--- a/assets/ppt/cfg/cfg1-intro.pptx
+++ b/assets/ppt/cfg/cfg1-intro.pptx
@@ -1831,7 +1831,7 @@
           <a:p>
             <a:fld id="{1B6DC762-1116-2146-A47C-D79A5A5DBAFD}" type="datetime1">
               <a:rPr lang="en-CA" smtClean="0"/>
-              <a:t>2020-09-27</a:t>
+              <a:t>2025-06-09</a:t>
             </a:fld>
             <a:endParaRPr lang="en-US"/>
           </a:p>
@@ -2029,7 +2029,7 @@
           <a:p>
             <a:fld id="{725FEDD1-5A1B-2342-BAF0-F7C5511A73CE}" type="datetime1">
               <a:rPr lang="en-CA" smtClean="0"/>
-              <a:t>2020-09-27</a:t>
+              <a:t>2025-06-09</a:t>
             </a:fld>
             <a:endParaRPr lang="en-US"/>
           </a:p>
@@ -2237,7 +2237,7 @@
           <a:p>
             <a:fld id="{F09E59AE-0AE1-4048-8BD6-D39FC0EBB194}" type="datetime1">
               <a:rPr lang="en-CA" smtClean="0"/>
-              <a:t>2020-09-27</a:t>
+              <a:t>2025-06-09</a:t>
             </a:fld>
             <a:endParaRPr lang="en-US"/>
           </a:p>
@@ -3712,7 +3712,7 @@
           <a:p>
             <a:fld id="{A2849525-9B7D-5945-A782-775278635E42}" type="datetime1">
               <a:rPr lang="en-CA" smtClean="0"/>
-              <a:t>2020-09-27</a:t>
+              <a:t>2025-06-09</a:t>
             </a:fld>
             <a:endParaRPr lang="en-US"/>
           </a:p>
@@ -3987,7 +3987,7 @@
           <a:p>
             <a:fld id="{D05E1499-BDD1-6940-8C79-13A8B8E63D57}" type="datetime1">
               <a:rPr lang="en-CA" smtClean="0"/>
-              <a:t>2020-09-27</a:t>
+              <a:t>2025-06-09</a:t>
             </a:fld>
             <a:endParaRPr lang="en-US"/>
           </a:p>
@@ -4252,7 +4252,7 @@
           <a:p>
             <a:fld id="{17E70EF3-18A7-4644-8DA2-1EB9CA66C736}" type="datetime1">
               <a:rPr lang="en-CA" smtClean="0"/>
-              <a:t>2020-09-27</a:t>
+              <a:t>2025-06-09</a:t>
             </a:fld>
             <a:endParaRPr lang="en-US"/>
           </a:p>
@@ -4664,7 +4664,7 @@
           <a:p>
             <a:fld id="{54538FC1-2481-FB4A-91E5-87F3422DE2D5}" type="datetime1">
               <a:rPr lang="en-CA" smtClean="0"/>
-              <a:t>2020-09-27</a:t>
+              <a:t>2025-06-09</a:t>
             </a:fld>
             <a:endParaRPr lang="en-US"/>
           </a:p>
@@ -4805,7 +4805,7 @@
           <a:p>
             <a:fld id="{93D5C515-1622-C840-89B2-A4A55D34866A}" type="datetime1">
               <a:rPr lang="en-CA" smtClean="0"/>
-              <a:t>2020-09-27</a:t>
+              <a:t>2025-06-09</a:t>
             </a:fld>
             <a:endParaRPr lang="en-US"/>
           </a:p>
@@ -4918,7 +4918,7 @@
           <a:p>
             <a:fld id="{B9077E75-6C88-BB47-AC6F-0DCA859E7113}" type="datetime1">
               <a:rPr lang="en-CA" smtClean="0"/>
-              <a:t>2020-09-27</a:t>
+              <a:t>2025-06-09</a:t>
             </a:fld>
             <a:endParaRPr lang="en-US"/>
           </a:p>
@@ -5229,7 +5229,7 @@
           <a:p>
             <a:fld id="{1AD12F8B-7E05-A047-BAC3-EE71BEBBE5BE}" type="datetime1">
               <a:rPr lang="en-CA" smtClean="0"/>
-              <a:t>2020-09-27</a:t>
+              <a:t>2025-06-09</a:t>
             </a:fld>
             <a:endParaRPr lang="en-US"/>
           </a:p>
@@ -5517,7 +5517,7 @@
           <a:p>
             <a:fld id="{C1D9F72A-E93E-B546-8268-6408A6E1DA62}" type="datetime1">
               <a:rPr lang="en-CA" smtClean="0"/>
-              <a:t>2020-09-27</a:t>
+              <a:t>2025-06-09</a:t>
             </a:fld>
             <a:endParaRPr lang="en-US"/>
           </a:p>
@@ -5760,7 +5760,7 @@
             <a:fld id="{97DF4AC7-DB73-7444-A2A7-FD79FE1A2B2B}" type="datetime1">
               <a:rPr lang="en-CA" smtClean="0"/>
               <a:pPr/>
-              <a:t>2020-09-27</a:t>
+              <a:t>2025-06-09</a:t>
             </a:fld>
             <a:endParaRPr lang="en-US" dirty="0"/>
           </a:p>
@@ -14957,7 +14957,7 @@
         </p:nvGrpSpPr>
         <p:grpSpPr>
           <a:xfrm>
-            <a:off x="863475" y="1836748"/>
+            <a:off x="860628" y="1389304"/>
             <a:ext cx="1564335" cy="381454"/>
             <a:chOff x="1400041" y="2058744"/>
             <a:chExt cx="2085780" cy="508607"/>
@@ -15113,7 +15113,7 @@
         </p:nvGrpSpPr>
         <p:grpSpPr>
           <a:xfrm>
-            <a:off x="1371923" y="1828743"/>
+            <a:off x="1409080" y="1371116"/>
             <a:ext cx="1571897" cy="397464"/>
             <a:chOff x="1112497" y="2061833"/>
             <a:chExt cx="2095863" cy="529952"/>
@@ -15269,7 +15269,7 @@
         </p:nvGrpSpPr>
         <p:grpSpPr>
           <a:xfrm>
-            <a:off x="1760916" y="1815667"/>
+            <a:off x="1762448" y="1380868"/>
             <a:ext cx="1714671" cy="394583"/>
             <a:chOff x="1152631" y="2058745"/>
             <a:chExt cx="2286230" cy="526110"/>
@@ -15699,11 +15699,11 @@
                                       <p:cBhvr>
                                         <p:cTn id="6" dur="1" fill="hold">
                                           <p:stCondLst>
-                                            <p:cond delay="499"/>
+                                            <p:cond delay="0"/>
                                           </p:stCondLst>
                                         </p:cTn>
                                         <p:tgtEl>
-                                          <p:spTgt spid="6"/>
+                                          <p:spTgt spid="39"/>
                                         </p:tgtEl>
                                         <p:attrNameLst>
                                           <p:attrName>style.visibility</p:attrName>
@@ -15735,7 +15735,7 @@
                             </p:stCondLst>
                             <p:childTnLst>
                               <p:par>
-                                <p:cTn id="9" presetID="1" presetClass="entr" presetSubtype="0" fill="hold" grpId="0" nodeType="clickEffect">
+                                <p:cTn id="9" presetID="1" presetClass="exit" presetSubtype="0" fill="hold" nodeType="clickEffect">
                                   <p:stCondLst>
                                     <p:cond delay="0"/>
                                   </p:stCondLst>
@@ -15748,14 +15748,14 @@
                                           </p:stCondLst>
                                         </p:cTn>
                                         <p:tgtEl>
-                                          <p:spTgt spid="27"/>
+                                          <p:spTgt spid="39"/>
                                         </p:tgtEl>
                                         <p:attrNameLst>
                                           <p:attrName>style.visibility</p:attrName>
                                         </p:attrNameLst>
                                       </p:cBhvr>
                                       <p:to>
-                                        <p:strVal val="visible"/>
+                                        <p:strVal val="hidden"/>
                                       </p:to>
                                     </p:set>
                                   </p:childTnLst>
@@ -15780,7 +15780,7 @@
                             </p:stCondLst>
                             <p:childTnLst>
                               <p:par>
-                                <p:cTn id="13" presetID="1" presetClass="entr" presetSubtype="0" fill="hold" grpId="0" nodeType="clickEffect">
+                                <p:cTn id="13" presetID="1" presetClass="entr" presetSubtype="0" fill="hold" nodeType="clickEffect">
                                   <p:stCondLst>
                                     <p:cond delay="0"/>
                                   </p:stCondLst>
@@ -15793,7 +15793,7 @@
                                           </p:stCondLst>
                                         </p:cTn>
                                         <p:tgtEl>
-                                          <p:spTgt spid="30"/>
+                                          <p:spTgt spid="42"/>
                                         </p:tgtEl>
                                         <p:attrNameLst>
                                           <p:attrName>style.visibility</p:attrName>
@@ -15825,7 +15825,7 @@
                             </p:stCondLst>
                             <p:childTnLst>
                               <p:par>
-                                <p:cTn id="17" presetID="1" presetClass="entr" presetSubtype="0" fill="hold" nodeType="clickEffect">
+                                <p:cTn id="17" presetID="1" presetClass="exit" presetSubtype="0" fill="hold" nodeType="clickEffect">
                                   <p:stCondLst>
                                     <p:cond delay="0"/>
                                   </p:stCondLst>
@@ -15838,14 +15838,14 @@
                                           </p:stCondLst>
                                         </p:cTn>
                                         <p:tgtEl>
-                                          <p:spTgt spid="52"/>
+                                          <p:spTgt spid="42"/>
                                         </p:tgtEl>
                                         <p:attrNameLst>
                                           <p:attrName>style.visibility</p:attrName>
                                         </p:attrNameLst>
                                       </p:cBhvr>
                                       <p:to>
-                                        <p:strVal val="visible"/>
+                                        <p:strVal val="hidden"/>
                                       </p:to>
                                     </p:set>
                                   </p:childTnLst>
@@ -15870,7 +15870,7 @@
                             </p:stCondLst>
                             <p:childTnLst>
                               <p:par>
-                                <p:cTn id="21" presetID="1" presetClass="entr" presetSubtype="0" fill="hold" grpId="0" nodeType="clickEffect">
+                                <p:cTn id="21" presetID="1" presetClass="entr" presetSubtype="0" fill="hold" nodeType="clickEffect">
                                   <p:stCondLst>
                                     <p:cond delay="0"/>
                                   </p:stCondLst>
@@ -15883,7 +15883,7 @@
                                           </p:stCondLst>
                                         </p:cTn>
                                         <p:tgtEl>
-                                          <p:spTgt spid="31"/>
+                                          <p:spTgt spid="46"/>
                                         </p:tgtEl>
                                         <p:attrNameLst>
                                           <p:attrName>style.visibility</p:attrName>
@@ -15915,7 +15915,7 @@
                             </p:stCondLst>
                             <p:childTnLst>
                               <p:par>
-                                <p:cTn id="25" presetID="1" presetClass="entr" presetSubtype="0" fill="hold" grpId="0" nodeType="clickEffect">
+                                <p:cTn id="25" presetID="1" presetClass="exit" presetSubtype="0" fill="hold" nodeType="clickEffect">
                                   <p:stCondLst>
                                     <p:cond delay="0"/>
                                   </p:stCondLst>
@@ -15928,14 +15928,14 @@
                                           </p:stCondLst>
                                         </p:cTn>
                                         <p:tgtEl>
-                                          <p:spTgt spid="32"/>
+                                          <p:spTgt spid="46"/>
                                         </p:tgtEl>
                                         <p:attrNameLst>
                                           <p:attrName>style.visibility</p:attrName>
                                         </p:attrNameLst>
                                       </p:cBhvr>
                                       <p:to>
-                                        <p:strVal val="visible"/>
+                                        <p:strVal val="hidden"/>
                                       </p:to>
                                     </p:set>
                                   </p:childTnLst>
@@ -15969,11 +15969,11 @@
                                       <p:cBhvr>
                                         <p:cTn id="30" dur="1" fill="hold">
                                           <p:stCondLst>
-                                            <p:cond delay="0"/>
+                                            <p:cond delay="499"/>
                                           </p:stCondLst>
                                         </p:cTn>
                                         <p:tgtEl>
-                                          <p:spTgt spid="69632"/>
+                                          <p:spTgt spid="6"/>
                                         </p:tgtEl>
                                         <p:attrNameLst>
                                           <p:attrName>style.visibility</p:attrName>
@@ -16018,7 +16018,7 @@
                                           </p:stCondLst>
                                         </p:cTn>
                                         <p:tgtEl>
-                                          <p:spTgt spid="33"/>
+                                          <p:spTgt spid="27"/>
                                         </p:tgtEl>
                                         <p:attrNameLst>
                                           <p:attrName>style.visibility</p:attrName>
@@ -16050,7 +16050,7 @@
                             </p:stCondLst>
                             <p:childTnLst>
                               <p:par>
-                                <p:cTn id="37" presetID="1" presetClass="entr" presetSubtype="0" fill="hold" nodeType="clickEffect">
+                                <p:cTn id="37" presetID="1" presetClass="entr" presetSubtype="0" fill="hold" grpId="0" nodeType="clickEffect">
                                   <p:stCondLst>
                                     <p:cond delay="0"/>
                                   </p:stCondLst>
@@ -16063,7 +16063,7 @@
                                           </p:stCondLst>
                                         </p:cTn>
                                         <p:tgtEl>
-                                          <p:spTgt spid="39"/>
+                                          <p:spTgt spid="30"/>
                                         </p:tgtEl>
                                         <p:attrNameLst>
                                           <p:attrName>style.visibility</p:attrName>
@@ -16095,7 +16095,7 @@
                             </p:stCondLst>
                             <p:childTnLst>
                               <p:par>
-                                <p:cTn id="41" presetID="1" presetClass="exit" presetSubtype="0" fill="hold" nodeType="clickEffect">
+                                <p:cTn id="41" presetID="1" presetClass="entr" presetSubtype="0" fill="hold" nodeType="clickEffect">
                                   <p:stCondLst>
                                     <p:cond delay="0"/>
                                   </p:stCondLst>
@@ -16108,14 +16108,14 @@
                                           </p:stCondLst>
                                         </p:cTn>
                                         <p:tgtEl>
-                                          <p:spTgt spid="39"/>
+                                          <p:spTgt spid="52"/>
                                         </p:tgtEl>
                                         <p:attrNameLst>
                                           <p:attrName>style.visibility</p:attrName>
                                         </p:attrNameLst>
                                       </p:cBhvr>
                                       <p:to>
-                                        <p:strVal val="hidden"/>
+                                        <p:strVal val="visible"/>
                                       </p:to>
                                     </p:set>
                                   </p:childTnLst>
@@ -16140,7 +16140,7 @@
                             </p:stCondLst>
                             <p:childTnLst>
                               <p:par>
-                                <p:cTn id="45" presetID="1" presetClass="entr" presetSubtype="0" fill="hold" nodeType="clickEffect">
+                                <p:cTn id="45" presetID="1" presetClass="entr" presetSubtype="0" fill="hold" grpId="0" nodeType="clickEffect">
                                   <p:stCondLst>
                                     <p:cond delay="0"/>
                                   </p:stCondLst>
@@ -16153,7 +16153,7 @@
                                           </p:stCondLst>
                                         </p:cTn>
                                         <p:tgtEl>
-                                          <p:spTgt spid="42"/>
+                                          <p:spTgt spid="31"/>
                                         </p:tgtEl>
                                         <p:attrNameLst>
                                           <p:attrName>style.visibility</p:attrName>
@@ -16185,7 +16185,7 @@
                             </p:stCondLst>
                             <p:childTnLst>
                               <p:par>
-                                <p:cTn id="49" presetID="1" presetClass="exit" presetSubtype="0" fill="hold" nodeType="clickEffect">
+                                <p:cTn id="49" presetID="1" presetClass="entr" presetSubtype="0" fill="hold" grpId="0" nodeType="clickEffect">
                                   <p:stCondLst>
                                     <p:cond delay="0"/>
                                   </p:stCondLst>
@@ -16198,14 +16198,14 @@
                                           </p:stCondLst>
                                         </p:cTn>
                                         <p:tgtEl>
-                                          <p:spTgt spid="42"/>
+                                          <p:spTgt spid="32"/>
                                         </p:tgtEl>
                                         <p:attrNameLst>
                                           <p:attrName>style.visibility</p:attrName>
                                         </p:attrNameLst>
                                       </p:cBhvr>
                                       <p:to>
-                                        <p:strVal val="hidden"/>
+                                        <p:strVal val="visible"/>
                                       </p:to>
                                     </p:set>
                                   </p:childTnLst>
@@ -16243,7 +16243,7 @@
                                           </p:stCondLst>
                                         </p:cTn>
                                         <p:tgtEl>
-                                          <p:spTgt spid="46"/>
+                                          <p:spTgt spid="69632"/>
                                         </p:tgtEl>
                                         <p:attrNameLst>
                                           <p:attrName>style.visibility</p:attrName>
@@ -16275,7 +16275,7 @@
                             </p:stCondLst>
                             <p:childTnLst>
                               <p:par>
-                                <p:cTn id="57" presetID="1" presetClass="exit" presetSubtype="0" fill="hold" nodeType="clickEffect">
+                                <p:cTn id="57" presetID="1" presetClass="entr" presetSubtype="0" fill="hold" grpId="0" nodeType="clickEffect">
                                   <p:stCondLst>
                                     <p:cond delay="0"/>
                                   </p:stCondLst>
@@ -16288,14 +16288,14 @@
                                           </p:stCondLst>
                                         </p:cTn>
                                         <p:tgtEl>
-                                          <p:spTgt spid="46"/>
+                                          <p:spTgt spid="33"/>
                                         </p:tgtEl>
                                         <p:attrNameLst>
                                           <p:attrName>style.visibility</p:attrName>
                                         </p:attrNameLst>
                                       </p:cBhvr>
                                       <p:to>
-                                        <p:strVal val="hidden"/>
+                                        <p:strVal val="visible"/>
                                       </p:to>
                                     </p:set>
                                   </p:childTnLst>
@@ -21597,7 +21597,7 @@
             <p:spPr>
               <a:xfrm>
                 <a:off x="3788457" y="2932439"/>
-                <a:ext cx="1709122" cy="523220"/>
+                <a:ext cx="1896673" cy="523220"/>
               </a:xfrm>
               <a:prstGeom prst="rect">
                 <a:avLst/>
@@ -21650,7 +21650,36 @@
                     </a:solidFill>
                     <a:latin typeface="Calibri" panose="020F0502020204030204" pitchFamily="34" charset="0"/>
                   </a:rPr>
-                  <a:t> ‘(‘ S ‘)</a:t>
+                  <a:t> ‘</a:t>
+                </a:r>
+                <a:r>
+                  <a:rPr lang="en-CA" sz="2800" dirty="0">
+                    <a:solidFill>
+                      <a:schemeClr val="accent2"/>
+                    </a:solidFill>
+                    <a:latin typeface="Consolas" panose="020B0609020204030204" pitchFamily="49" charset="0"/>
+                    <a:cs typeface="Consolas" panose="020B0609020204030204" pitchFamily="49" charset="0"/>
+                  </a:rPr>
+                  <a:t>(</a:t>
+                </a:r>
+                <a:r>
+                  <a:rPr lang="en-CA" sz="2800" dirty="0">
+                    <a:solidFill>
+                      <a:schemeClr val="accent2"/>
+                    </a:solidFill>
+                    <a:latin typeface="Calibri" panose="020F0502020204030204" pitchFamily="34" charset="0"/>
+                  </a:rPr>
+                  <a:t>‘ S ‘</a:t>
+                </a:r>
+                <a:r>
+                  <a:rPr lang="en-CA" sz="2800" dirty="0">
+                    <a:solidFill>
+                      <a:schemeClr val="accent2"/>
+                    </a:solidFill>
+                    <a:latin typeface="Consolas" panose="020B0609020204030204" pitchFamily="49" charset="0"/>
+                    <a:cs typeface="Consolas" panose="020B0609020204030204" pitchFamily="49" charset="0"/>
+                  </a:rPr>
+                  <a:t>)</a:t>
                 </a:r>
                 <a:r>
                   <a:rPr lang="en-US" sz="2800" dirty="0">
@@ -21689,7 +21718,7 @@
             <p:spPr>
               <a:xfrm>
                 <a:off x="3788457" y="2932439"/>
-                <a:ext cx="1709122" cy="523220"/>
+                <a:ext cx="1896673" cy="523220"/>
               </a:xfrm>
               <a:prstGeom prst="rect">
                 <a:avLst/>
@@ -21697,7 +21726,7 @@
               <a:blipFill>
                 <a:blip r:embed="rId3"/>
                 <a:stretch>
-                  <a:fillRect l="-7407" t="-11628" r="-7407" b="-27907"/>
+                  <a:fillRect l="-6667" t="-11628" r="-6000" b="-27907"/>
                 </a:stretch>
               </a:blipFill>
             </p:spPr>
@@ -22050,7 +22079,95 @@
           <a:p>
             <a:r>
               <a:rPr lang="en-US" sz="1600" dirty="0"/>
-              <a:t>Q: Modify this CFG to use the alphabet { ‘(‘, ‘)’, ‘{‘, ‘}’, ‘[‘, ‘]’ } where opening and closing parentheses must of the same type. So “({[()]})” is valid but “(}” is invalid.</a:t>
+              <a:t>Q: Modify this CFG to use the alphabet { </a:t>
+            </a:r>
+            <a:r>
+              <a:rPr lang="en-US" sz="1600" dirty="0">
+                <a:latin typeface="Consolas" panose="020B0609020204030204" pitchFamily="49" charset="0"/>
+                <a:cs typeface="Consolas" panose="020B0609020204030204" pitchFamily="49" charset="0"/>
+              </a:rPr>
+              <a:t>(</a:t>
+            </a:r>
+            <a:r>
+              <a:rPr lang="en-US" sz="1600" dirty="0"/>
+              <a:t>, </a:t>
+            </a:r>
+            <a:r>
+              <a:rPr lang="en-US" sz="1600" dirty="0">
+                <a:latin typeface="Consolas" panose="020B0609020204030204" pitchFamily="49" charset="0"/>
+                <a:cs typeface="Consolas" panose="020B0609020204030204" pitchFamily="49" charset="0"/>
+              </a:rPr>
+              <a:t>)</a:t>
+            </a:r>
+            <a:r>
+              <a:rPr lang="en-US" sz="1600" dirty="0"/>
+              <a:t>, </a:t>
+            </a:r>
+            <a:r>
+              <a:rPr lang="en-US" sz="1600" dirty="0">
+                <a:latin typeface="Consolas" panose="020B0609020204030204" pitchFamily="49" charset="0"/>
+                <a:cs typeface="Consolas" panose="020B0609020204030204" pitchFamily="49" charset="0"/>
+              </a:rPr>
+              <a:t>{</a:t>
+            </a:r>
+            <a:r>
+              <a:rPr lang="en-US" sz="1600" dirty="0"/>
+              <a:t>, </a:t>
+            </a:r>
+            <a:r>
+              <a:rPr lang="en-US" sz="1600" dirty="0">
+                <a:latin typeface="Consolas" panose="020B0609020204030204" pitchFamily="49" charset="0"/>
+                <a:cs typeface="Consolas" panose="020B0609020204030204" pitchFamily="49" charset="0"/>
+              </a:rPr>
+              <a:t>}</a:t>
+            </a:r>
+            <a:r>
+              <a:rPr lang="en-US" sz="1600" dirty="0"/>
+              <a:t>, </a:t>
+            </a:r>
+            <a:r>
+              <a:rPr lang="en-US" sz="1600" dirty="0">
+                <a:latin typeface="Consolas" panose="020B0609020204030204" pitchFamily="49" charset="0"/>
+                <a:cs typeface="Consolas" panose="020B0609020204030204" pitchFamily="49" charset="0"/>
+              </a:rPr>
+              <a:t>[</a:t>
+            </a:r>
+            <a:r>
+              <a:rPr lang="en-US" sz="1600" dirty="0"/>
+              <a:t>, </a:t>
+            </a:r>
+            <a:r>
+              <a:rPr lang="en-US" sz="1600" dirty="0">
+                <a:latin typeface="Consolas" panose="020B0609020204030204" pitchFamily="49" charset="0"/>
+                <a:cs typeface="Consolas" panose="020B0609020204030204" pitchFamily="49" charset="0"/>
+              </a:rPr>
+              <a:t>]</a:t>
+            </a:r>
+            <a:r>
+              <a:rPr lang="en-US" sz="1600" dirty="0"/>
+              <a:t> } where opening and closing parentheses must of the same type. So “</a:t>
+            </a:r>
+            <a:r>
+              <a:rPr lang="en-US" sz="1600" dirty="0">
+                <a:latin typeface="Consolas" panose="020B0609020204030204" pitchFamily="49" charset="0"/>
+                <a:cs typeface="Consolas" panose="020B0609020204030204" pitchFamily="49" charset="0"/>
+              </a:rPr>
+              <a:t>({[()]})</a:t>
+            </a:r>
+            <a:r>
+              <a:rPr lang="en-US" sz="1600" dirty="0"/>
+              <a:t>” is valid but “</a:t>
+            </a:r>
+            <a:r>
+              <a:rPr lang="en-US" sz="1600" dirty="0">
+                <a:latin typeface="Consolas" panose="020B0609020204030204" pitchFamily="49" charset="0"/>
+                <a:cs typeface="Consolas" panose="020B0609020204030204" pitchFamily="49" charset="0"/>
+              </a:rPr>
+              <a:t>(}</a:t>
+            </a:r>
+            <a:r>
+              <a:rPr lang="en-US" sz="1600" dirty="0"/>
+              <a:t>” is invalid.</a:t>
             </a:r>
           </a:p>
         </p:txBody>
@@ -22069,8 +22186,8 @@
         </p:nvSpPr>
         <p:spPr>
           <a:xfrm>
-            <a:off x="822493" y="2110084"/>
-            <a:ext cx="2293000" cy="523221"/>
+            <a:off x="822492" y="2110084"/>
+            <a:ext cx="2597380" cy="734901"/>
           </a:xfrm>
           <a:prstGeom prst="wedgeRectCallout">
             <a:avLst>
@@ -22101,7 +22218,18 @@
           <a:p>
             <a:r>
               <a:rPr lang="en-US" sz="1600" dirty="0"/>
-              <a:t>Q: Does the string “()(())” belong to this language?</a:t>
+              <a:t>Q: Does the string “</a:t>
+            </a:r>
+            <a:r>
+              <a:rPr lang="en-US" sz="1600" dirty="0">
+                <a:latin typeface="Consolas" panose="020B0609020204030204" pitchFamily="49" charset="0"/>
+                <a:cs typeface="Consolas" panose="020B0609020204030204" pitchFamily="49" charset="0"/>
+              </a:rPr>
+              <a:t>()(())</a:t>
+            </a:r>
+            <a:r>
+              <a:rPr lang="en-US" sz="1600" dirty="0"/>
+              <a:t>” belong to this language?</a:t>
             </a:r>
           </a:p>
         </p:txBody>
@@ -23656,8 +23784,8 @@
           </a:p>
         </p:txBody>
       </p:sp>
-      <mc:AlternateContent xmlns:mc="http://schemas.openxmlformats.org/markup-compatibility/2006">
-        <mc:Choice xmlns:a14="http://schemas.microsoft.com/office/drawing/2010/main" Requires="a14">
+      <mc:AlternateContent xmlns:mc="http://schemas.openxmlformats.org/markup-compatibility/2006" xmlns:a14="http://schemas.microsoft.com/office/drawing/2010/main">
+        <mc:Choice Requires="a14">
           <p:sp>
             <p:nvSpPr>
               <p:cNvPr id="3" name="Content Placeholder 2"/>
@@ -23978,7 +24106,7 @@
             </p:txBody>
           </p:sp>
         </mc:Choice>
-        <mc:Fallback>
+        <mc:Fallback xmlns="">
           <p:sp>
             <p:nvSpPr>
               <p:cNvPr id="3" name="Content Placeholder 2"/>
@@ -25725,6 +25853,175 @@
           </p:txBody>
         </p:sp>
       </p:grpSp>
+      <mc:AlternateContent xmlns:mc="http://schemas.openxmlformats.org/markup-compatibility/2006">
+        <mc:Choice xmlns:a14="http://schemas.microsoft.com/office/drawing/2010/main" Requires="a14">
+          <p:sp>
+            <p:nvSpPr>
+              <p:cNvPr id="15" name="Rectangle 14">
+                <a:extLst>
+                  <a:ext uri="{FF2B5EF4-FFF2-40B4-BE49-F238E27FC236}">
+                    <a16:creationId xmlns:a16="http://schemas.microsoft.com/office/drawing/2014/main" id="{13CAA9FB-A3F0-7453-4020-CA7B62620952}"/>
+                  </a:ext>
+                </a:extLst>
+              </p:cNvPr>
+              <p:cNvSpPr/>
+              <p:nvPr/>
+            </p:nvSpPr>
+            <p:spPr>
+              <a:xfrm>
+                <a:off x="6386922" y="553560"/>
+                <a:ext cx="1892498" cy="830997"/>
+              </a:xfrm>
+              <a:prstGeom prst="rect">
+                <a:avLst/>
+              </a:prstGeom>
+            </p:spPr>
+            <p:txBody>
+              <a:bodyPr wrap="square">
+                <a:spAutoFit/>
+              </a:bodyPr>
+              <a:lstStyle/>
+              <a:p>
+                <a:r>
+                  <a:rPr lang="en-CA" dirty="0">
+                    <a:solidFill>
+                      <a:schemeClr val="accent2"/>
+                    </a:solidFill>
+                    <a:latin typeface="Calibri" panose="020F0502020204030204" pitchFamily="34" charset="0"/>
+                  </a:rPr>
+                  <a:t>r1: S</a:t>
+                </a:r>
+                <a:r>
+                  <a:rPr lang="en-CA" dirty="0">
+                    <a:solidFill>
+                      <a:schemeClr val="accent2"/>
+                    </a:solidFill>
+                    <a:latin typeface="Calibri" panose="020F0502020204030204" pitchFamily="34" charset="0"/>
+                    <a:ea typeface="Cambria Math"/>
+                  </a:rPr>
+                  <a:t> </a:t>
+                </a:r>
+                <a14:m>
+                  <m:oMath xmlns:m="http://schemas.openxmlformats.org/officeDocument/2006/math">
+                    <m:r>
+                      <a:rPr lang="en-CA" i="1">
+                        <a:solidFill>
+                          <a:schemeClr val="accent2"/>
+                        </a:solidFill>
+                        <a:latin typeface="Cambria Math"/>
+                        <a:ea typeface="Cambria Math"/>
+                      </a:rPr>
+                      <m:t>→</m:t>
+                    </m:r>
+                  </m:oMath>
+                </a14:m>
+                <a:r>
+                  <a:rPr lang="en-CA" dirty="0">
+                    <a:solidFill>
+                      <a:schemeClr val="accent2"/>
+                    </a:solidFill>
+                    <a:latin typeface="Calibri" panose="020F0502020204030204" pitchFamily="34" charset="0"/>
+                  </a:rPr>
+                  <a:t> ( S )</a:t>
+                </a:r>
+              </a:p>
+              <a:p>
+                <a:r>
+                  <a:rPr lang="en-CA" dirty="0">
+                    <a:solidFill>
+                      <a:schemeClr val="accent2"/>
+                    </a:solidFill>
+                    <a:latin typeface="Calibri" panose="020F0502020204030204" pitchFamily="34" charset="0"/>
+                  </a:rPr>
+                  <a:t>r2: S </a:t>
+                </a:r>
+                <a14:m>
+                  <m:oMath xmlns:m="http://schemas.openxmlformats.org/officeDocument/2006/math">
+                    <m:r>
+                      <a:rPr lang="en-CA" i="1">
+                        <a:solidFill>
+                          <a:schemeClr val="accent2"/>
+                        </a:solidFill>
+                        <a:latin typeface="Cambria Math"/>
+                        <a:ea typeface="Cambria Math"/>
+                      </a:rPr>
+                      <m:t>→</m:t>
+                    </m:r>
+                  </m:oMath>
+                </a14:m>
+                <a:r>
+                  <a:rPr lang="en-CA" dirty="0">
+                    <a:solidFill>
+                      <a:schemeClr val="accent2"/>
+                    </a:solidFill>
+                    <a:latin typeface="Calibri" panose="020F0502020204030204" pitchFamily="34" charset="0"/>
+                  </a:rPr>
+                  <a:t> </a:t>
+                </a:r>
+                <a:r>
+                  <a:rPr lang="el-GR" dirty="0">
+                    <a:solidFill>
+                      <a:schemeClr val="accent2"/>
+                    </a:solidFill>
+                    <a:latin typeface="Calibri" panose="020F0502020204030204" pitchFamily="34" charset="0"/>
+                  </a:rPr>
+                  <a:t>ε</a:t>
+                </a:r>
+                <a:endParaRPr lang="en-CA" dirty="0">
+                  <a:solidFill>
+                    <a:schemeClr val="accent2"/>
+                  </a:solidFill>
+                  <a:latin typeface="Calibri" panose="020F0502020204030204" pitchFamily="34" charset="0"/>
+                </a:endParaRPr>
+              </a:p>
+            </p:txBody>
+          </p:sp>
+        </mc:Choice>
+        <mc:Fallback>
+          <p:sp>
+            <p:nvSpPr>
+              <p:cNvPr id="15" name="Rectangle 14">
+                <a:extLst>
+                  <a:ext uri="{FF2B5EF4-FFF2-40B4-BE49-F238E27FC236}">
+                    <a16:creationId xmlns:a16="http://schemas.microsoft.com/office/drawing/2014/main" id="{13CAA9FB-A3F0-7453-4020-CA7B62620952}"/>
+                  </a:ext>
+                </a:extLst>
+              </p:cNvPr>
+              <p:cNvSpPr>
+                <a:spLocks noRot="1" noChangeAspect="1" noMove="1" noResize="1" noEditPoints="1" noAdjustHandles="1" noChangeArrowheads="1" noChangeShapeType="1" noTextEdit="1"/>
+              </p:cNvSpPr>
+              <p:nvPr/>
+            </p:nvSpPr>
+            <p:spPr>
+              <a:xfrm>
+                <a:off x="6386922" y="553560"/>
+                <a:ext cx="1892498" cy="830997"/>
+              </a:xfrm>
+              <a:prstGeom prst="rect">
+                <a:avLst/>
+              </a:prstGeom>
+              <a:blipFill>
+                <a:blip r:embed="rId2"/>
+                <a:stretch>
+                  <a:fillRect l="-5369" t="-4545" b="-16667"/>
+                </a:stretch>
+              </a:blipFill>
+            </p:spPr>
+            <p:txBody>
+              <a:bodyPr/>
+              <a:lstStyle/>
+              <a:p>
+                <a:r>
+                  <a:rPr lang="en-US">
+                    <a:noFill/>
+                  </a:rPr>
+                  <a:t> </a:t>
+                </a:r>
+              </a:p>
+            </p:txBody>
+          </p:sp>
+        </mc:Fallback>
+      </mc:AlternateContent>
     </p:spTree>
     <p:extLst>
       <p:ext uri="{BB962C8B-B14F-4D97-AF65-F5344CB8AC3E}">
@@ -26103,6 +26400,51 @@
                       </p:childTnLst>
                     </p:cTn>
                   </p:par>
+                  <p:par>
+                    <p:cTn id="35" fill="hold">
+                      <p:stCondLst>
+                        <p:cond delay="indefinite"/>
+                      </p:stCondLst>
+                      <p:childTnLst>
+                        <p:par>
+                          <p:cTn id="36" fill="hold">
+                            <p:stCondLst>
+                              <p:cond delay="0"/>
+                            </p:stCondLst>
+                            <p:childTnLst>
+                              <p:par>
+                                <p:cTn id="37" presetID="1" presetClass="entr" presetSubtype="0" fill="hold" grpId="0" nodeType="clickEffect">
+                                  <p:stCondLst>
+                                    <p:cond delay="0"/>
+                                  </p:stCondLst>
+                                  <p:childTnLst>
+                                    <p:set>
+                                      <p:cBhvr>
+                                        <p:cTn id="38" dur="1" fill="hold">
+                                          <p:stCondLst>
+                                            <p:cond delay="0"/>
+                                          </p:stCondLst>
+                                        </p:cTn>
+                                        <p:tgtEl>
+                                          <p:spTgt spid="15"/>
+                                        </p:tgtEl>
+                                        <p:attrNameLst>
+                                          <p:attrName>style.visibility</p:attrName>
+                                        </p:attrNameLst>
+                                      </p:cBhvr>
+                                      <p:to>
+                                        <p:strVal val="visible"/>
+                                      </p:to>
+                                    </p:set>
+                                  </p:childTnLst>
+                                </p:cTn>
+                              </p:par>
+                            </p:childTnLst>
+                          </p:cTn>
+                        </p:par>
+                      </p:childTnLst>
+                    </p:cTn>
+                  </p:par>
                 </p:childTnLst>
               </p:cTn>
               <p:prevCondLst>
@@ -26129,6 +26471,7 @@
       <p:bldP spid="5" grpId="0"/>
       <p:bldP spid="6" grpId="0"/>
       <p:bldP spid="31" grpId="0" animBg="1"/>
+      <p:bldP spid="15" grpId="0"/>
     </p:bldLst>
   </p:timing>
 </p:sld>

--- a/assets/ppt/cfg/cfg1-intro.pptx
+++ b/assets/ppt/cfg/cfg1-intro.pptx
@@ -25853,8 +25853,8 @@
           </p:txBody>
         </p:sp>
       </p:grpSp>
-      <mc:AlternateContent xmlns:mc="http://schemas.openxmlformats.org/markup-compatibility/2006">
-        <mc:Choice xmlns:a14="http://schemas.microsoft.com/office/drawing/2010/main" Requires="a14">
+      <mc:AlternateContent xmlns:mc="http://schemas.openxmlformats.org/markup-compatibility/2006" xmlns:a14="http://schemas.microsoft.com/office/drawing/2010/main">
+        <mc:Choice Requires="a14">
           <p:sp>
             <p:nvSpPr>
               <p:cNvPr id="15" name="Rectangle 14">
@@ -25977,7 +25977,7 @@
             </p:txBody>
           </p:sp>
         </mc:Choice>
-        <mc:Fallback>
+        <mc:Fallback xmlns="">
           <p:sp>
             <p:nvSpPr>
               <p:cNvPr id="15" name="Rectangle 14">
@@ -26400,51 +26400,6 @@
                       </p:childTnLst>
                     </p:cTn>
                   </p:par>
-                  <p:par>
-                    <p:cTn id="35" fill="hold">
-                      <p:stCondLst>
-                        <p:cond delay="indefinite"/>
-                      </p:stCondLst>
-                      <p:childTnLst>
-                        <p:par>
-                          <p:cTn id="36" fill="hold">
-                            <p:stCondLst>
-                              <p:cond delay="0"/>
-                            </p:stCondLst>
-                            <p:childTnLst>
-                              <p:par>
-                                <p:cTn id="37" presetID="1" presetClass="entr" presetSubtype="0" fill="hold" grpId="0" nodeType="clickEffect">
-                                  <p:stCondLst>
-                                    <p:cond delay="0"/>
-                                  </p:stCondLst>
-                                  <p:childTnLst>
-                                    <p:set>
-                                      <p:cBhvr>
-                                        <p:cTn id="38" dur="1" fill="hold">
-                                          <p:stCondLst>
-                                            <p:cond delay="0"/>
-                                          </p:stCondLst>
-                                        </p:cTn>
-                                        <p:tgtEl>
-                                          <p:spTgt spid="15"/>
-                                        </p:tgtEl>
-                                        <p:attrNameLst>
-                                          <p:attrName>style.visibility</p:attrName>
-                                        </p:attrNameLst>
-                                      </p:cBhvr>
-                                      <p:to>
-                                        <p:strVal val="visible"/>
-                                      </p:to>
-                                    </p:set>
-                                  </p:childTnLst>
-                                </p:cTn>
-                              </p:par>
-                            </p:childTnLst>
-                          </p:cTn>
-                        </p:par>
-                      </p:childTnLst>
-                    </p:cTn>
-                  </p:par>
                 </p:childTnLst>
               </p:cTn>
               <p:prevCondLst>
@@ -26471,7 +26426,6 @@
       <p:bldP spid="5" grpId="0"/>
       <p:bldP spid="6" grpId="0"/>
       <p:bldP spid="31" grpId="0" animBg="1"/>
-      <p:bldP spid="15" grpId="0"/>
     </p:bldLst>
   </p:timing>
 </p:sld>
